--- a/火车票Agent页.pptx
+++ b/火车票Agent页.pptx
@@ -125,6 +125,242 @@
     </p:extLst>
   </p:cmAuthor>
 </p:cmAuthorLst>
+</file>
+
+<file path=ppt/charts/chart1.xml><?xml version="1.0" encoding="utf-8"?>
+<c:chartSpace xmlns:c="http://schemas.openxmlformats.org/drawingml/2006/chart" xmlns:a="http://schemas.openxmlformats.org/drawingml/2006/main" xmlns:r="http://schemas.openxmlformats.org/officeDocument/2006/relationships">
+  <c:date1904 val="0"/>
+  <c:chart>
+    <c:autoTitleDeleted val="1"/>
+    <c:plotArea>
+      <c:barChart>
+        <c:barDir val="bar"/>
+        <c:grouping val="stacked"/>
+        <c:ser>
+          <c:idx val="0"/>
+          <c:order val="0"/>
+          <c:tx>
+            <c:strRef>
+              <c:f>Sheet1!$B$1</c:f>
+              <c:strCache>
+                <c:ptCount val="1"/>
+                <c:pt idx="0">
+                  <c:v>一致</c:v>
+                </c:pt>
+              </c:strCache>
+            </c:strRef>
+          </c:tx>
+          <c:spPr>
+            <a:solidFill>
+              <a:srgbClr val="C9DCF8"/>
+            </a:solidFill>
+          </c:spPr>
+          <c:cat>
+            <c:strRef>
+              <c:f>Sheet1!$A$2:$A$2</c:f>
+              <c:strCache>
+                <c:ptCount val="1"/>
+                <c:pt idx="0">
+                  <c:v>样本</c:v>
+                </c:pt>
+              </c:strCache>
+            </c:strRef>
+          </c:cat>
+          <c:val>
+            <c:numRef>
+              <c:f>Sheet1!$B$2:$B$2</c:f>
+              <c:numCache>
+                <c:formatCode>General</c:formatCode>
+                <c:ptCount val="1"/>
+                <c:pt idx="0">
+                  <c:v>749</c:v>
+                </c:pt>
+              </c:numCache>
+            </c:numRef>
+          </c:val>
+        </c:ser>
+        <c:ser>
+          <c:idx val="1"/>
+          <c:order val="1"/>
+          <c:tx>
+            <c:strRef>
+              <c:f>Sheet1!$C$1</c:f>
+              <c:strCache>
+                <c:ptCount val="1"/>
+                <c:pt idx="0">
+                  <c:v>Agent 对</c:v>
+                </c:pt>
+              </c:strCache>
+            </c:strRef>
+          </c:tx>
+          <c:spPr>
+            <a:solidFill>
+              <a:srgbClr val="8DB8F5"/>
+            </a:solidFill>
+          </c:spPr>
+          <c:cat>
+            <c:strRef>
+              <c:f>Sheet1!$A$2:$A$2</c:f>
+              <c:strCache>
+                <c:ptCount val="1"/>
+                <c:pt idx="0">
+                  <c:v>样本</c:v>
+                </c:pt>
+              </c:strCache>
+            </c:strRef>
+          </c:cat>
+          <c:val>
+            <c:numRef>
+              <c:f>Sheet1!$C$2:$C$2</c:f>
+              <c:numCache>
+                <c:formatCode>General</c:formatCode>
+                <c:ptCount val="1"/>
+                <c:pt idx="0">
+                  <c:v>197</c:v>
+                </c:pt>
+              </c:numCache>
+            </c:numRef>
+          </c:val>
+        </c:ser>
+        <c:ser>
+          <c:idx val="2"/>
+          <c:order val="2"/>
+          <c:tx>
+            <c:strRef>
+              <c:f>Sheet1!$D$1</c:f>
+              <c:strCache>
+                <c:ptCount val="1"/>
+                <c:pt idx="0">
+                  <c:v>算法对、Agent 错</c:v>
+                </c:pt>
+              </c:strCache>
+            </c:strRef>
+          </c:tx>
+          <c:spPr>
+            <a:solidFill>
+              <a:srgbClr val="FF7A1A"/>
+            </a:solidFill>
+          </c:spPr>
+          <c:cat>
+            <c:strRef>
+              <c:f>Sheet1!$A$2:$A$2</c:f>
+              <c:strCache>
+                <c:ptCount val="1"/>
+                <c:pt idx="0">
+                  <c:v>样本</c:v>
+                </c:pt>
+              </c:strCache>
+            </c:strRef>
+          </c:cat>
+          <c:val>
+            <c:numRef>
+              <c:f>Sheet1!$D$2:$D$2</c:f>
+              <c:numCache>
+                <c:formatCode>General</c:formatCode>
+                <c:ptCount val="1"/>
+                <c:pt idx="0">
+                  <c:v>21</c:v>
+                </c:pt>
+              </c:numCache>
+            </c:numRef>
+          </c:val>
+        </c:ser>
+        <c:ser>
+          <c:idx val="3"/>
+          <c:order val="3"/>
+          <c:tx>
+            <c:strRef>
+              <c:f>Sheet1!$E$1</c:f>
+              <c:strCache>
+                <c:ptCount val="1"/>
+                <c:pt idx="0">
+                  <c:v>都错</c:v>
+                </c:pt>
+              </c:strCache>
+            </c:strRef>
+          </c:tx>
+          <c:spPr>
+            <a:solidFill>
+              <a:srgbClr val="7A8599"/>
+            </a:solidFill>
+          </c:spPr>
+          <c:cat>
+            <c:strRef>
+              <c:f>Sheet1!$A$2:$A$2</c:f>
+              <c:strCache>
+                <c:ptCount val="1"/>
+                <c:pt idx="0">
+                  <c:v>样本</c:v>
+                </c:pt>
+              </c:strCache>
+            </c:strRef>
+          </c:cat>
+          <c:val>
+            <c:numRef>
+              <c:f>Sheet1!$E$2:$E$2</c:f>
+              <c:numCache>
+                <c:formatCode>General</c:formatCode>
+                <c:ptCount val="1"/>
+                <c:pt idx="0">
+                  <c:v>33</c:v>
+                </c:pt>
+              </c:numCache>
+            </c:numRef>
+          </c:val>
+        </c:ser>
+        <c:gapWidth val="0"/>
+        <c:overlap val="100"/>
+        <c:axId val="-2068027336"/>
+        <c:axId val="-2113994440"/>
+      </c:barChart>
+      <c:catAx>
+        <c:axId val="-2068027336"/>
+        <c:scaling>
+          <c:orientation val="minMax"/>
+        </c:scaling>
+        <c:delete/>
+        <c:axPos val="l"/>
+        <c:majorTickMark val="out"/>
+        <c:minorTickMark val="none"/>
+        <c:tickLblPos val="nextTo"/>
+        <c:crossAx val="-2113994440"/>
+        <c:crosses val="autoZero"/>
+        <c:auto val="1"/>
+        <c:lblAlgn val="ctr"/>
+        <c:lblOffset val="100"/>
+        <c:noMultiLvlLbl val="0"/>
+      </c:catAx>
+      <c:valAx>
+        <c:axId val="-2113994440"/>
+        <c:scaling>
+          <c:max val="1000.0"/>
+          <c:min val="0.0"/>
+        </c:scaling>
+        <c:delete/>
+        <c:axPos val="b"/>
+        <c:majorTickMark val="out"/>
+        <c:minorTickMark val="none"/>
+        <c:tickLblPos val="nextTo"/>
+        <c:crossAx val="-2068027336"/>
+        <c:crosses val="autoZero"/>
+      </c:valAx>
+    </c:plotArea>
+    <c:dispBlanksAs val="gap"/>
+  </c:chart>
+  <c:txPr>
+    <a:bodyPr/>
+    <a:lstStyle/>
+    <a:p>
+      <a:pPr>
+        <a:defRPr sz="1800"/>
+      </a:pPr>
+      <a:endParaRPr lang="en-US"/>
+    </a:p>
+  </c:txPr>
+  <c:externalData r:id="rId1">
+    <c:autoUpdate val="0"/>
+  </c:externalData>
+</c:chartSpace>
 </file>
 
 <file path=ppt/notesMasters/notesMaster1.xml><?xml version="1.0" encoding="utf-8"?>
@@ -5757,7 +5993,7 @@
         </p:nvSpPr>
         <p:spPr>
           <a:xfrm>
-            <a:off x="502920" y="2176272"/>
+            <a:off x="502920" y="2148840"/>
             <a:ext cx="502920" cy="502920"/>
           </a:xfrm>
           <a:prstGeom prst="ellipse">
@@ -5807,7 +6043,7 @@
         </p:blipFill>
         <p:spPr>
           <a:xfrm>
-            <a:off x="628650" y="2302002"/>
+            <a:off x="628650" y="2274570"/>
             <a:ext cx="251460" cy="251460"/>
           </a:xfrm>
           <a:prstGeom prst="rect">
@@ -5823,7 +6059,7 @@
         </p:nvSpPr>
         <p:spPr>
           <a:xfrm>
-            <a:off x="1188720" y="2157984"/>
+            <a:off x="1188720" y="2130552"/>
             <a:ext cx="4709160" cy="329184"/>
           </a:xfrm>
           <a:prstGeom prst="rect">
@@ -5860,8 +6096,8 @@
         </p:nvSpPr>
         <p:spPr>
           <a:xfrm>
-            <a:off x="1188720" y="2523744"/>
-            <a:ext cx="4709160" cy="731520"/>
+            <a:off x="1188720" y="2478024"/>
+            <a:ext cx="4709160" cy="640080"/>
           </a:xfrm>
           <a:prstGeom prst="rect">
             <a:avLst/>
@@ -5901,7 +6137,7 @@
           <a:p>
             <a:pPr algn="l">
               <a:spcBef>
-                <a:spcPts val="400"/>
+                <a:spcPts val="300"/>
               </a:spcBef>
             </a:pPr>
             <a:r>
@@ -5937,7 +6173,7 @@
         </p:nvSpPr>
         <p:spPr>
           <a:xfrm>
-            <a:off x="502920" y="3364991"/>
+            <a:off x="502920" y="3200400"/>
             <a:ext cx="502920" cy="502920"/>
           </a:xfrm>
           <a:prstGeom prst="ellipse">
@@ -5987,7 +6223,7 @@
         </p:blipFill>
         <p:spPr>
           <a:xfrm>
-            <a:off x="628650" y="3490722"/>
+            <a:off x="628650" y="3326130"/>
             <a:ext cx="251460" cy="251460"/>
           </a:xfrm>
           <a:prstGeom prst="rect">
@@ -6003,7 +6239,7 @@
         </p:nvSpPr>
         <p:spPr>
           <a:xfrm>
-            <a:off x="1188720" y="3346703"/>
+            <a:off x="1188720" y="3182112"/>
             <a:ext cx="4709160" cy="329184"/>
           </a:xfrm>
           <a:prstGeom prst="rect">
@@ -6040,8 +6276,8 @@
         </p:nvSpPr>
         <p:spPr>
           <a:xfrm>
-            <a:off x="1188720" y="3712463"/>
-            <a:ext cx="4709160" cy="731520"/>
+            <a:off x="1188720" y="3529584"/>
+            <a:ext cx="4709160" cy="640080"/>
           </a:xfrm>
           <a:prstGeom prst="rect">
             <a:avLst/>
@@ -6078,35 +6314,6 @@
               <a:t>抽样 1,000 条线上 query，与算法业务标签逐条比对</a:t>
             </a:r>
           </a:p>
-          <a:p>
-            <a:pPr algn="l">
-              <a:spcBef>
-                <a:spcPts val="400"/>
-              </a:spcBef>
-            </a:pPr>
-            <a:r>
-              <a:rPr sz="900" b="0">
-                <a:solidFill>
-                  <a:srgbClr val="287DFA"/>
-                </a:solidFill>
-                <a:latin typeface="微软雅黑"/>
-                <a:ea typeface="微软雅黑"/>
-                <a:cs typeface="微软雅黑"/>
-              </a:rPr>
-              <a:t>●  </a:t>
-            </a:r>
-            <a:r>
-              <a:rPr sz="1300" b="0">
-                <a:solidFill>
-                  <a:srgbClr val="3D4757"/>
-                </a:solidFill>
-                <a:latin typeface="微软雅黑"/>
-                <a:ea typeface="微软雅黑"/>
-                <a:cs typeface="微软雅黑"/>
-              </a:rPr>
-              <a:t>针对“算法正确、Agent 错误”的样本，逐类修订分类标准</a:t>
-            </a:r>
-          </a:p>
         </p:txBody>
       </p:sp>
       <p:sp>
@@ -6117,8 +6324,8 @@
         </p:nvSpPr>
         <p:spPr>
           <a:xfrm>
-            <a:off x="457200" y="4572000"/>
-            <a:ext cx="5486400" cy="1508760"/>
+            <a:off x="457200" y="4617720"/>
+            <a:ext cx="5486400" cy="1463040"/>
           </a:xfrm>
           <a:prstGeom prst="roundRect">
             <a:avLst>
@@ -6161,7 +6368,7 @@
         </p:nvSpPr>
         <p:spPr>
           <a:xfrm>
-            <a:off x="731520" y="4663440"/>
+            <a:off x="731520" y="4690872"/>
             <a:ext cx="1828800" cy="274320"/>
           </a:xfrm>
           <a:prstGeom prst="rect">
@@ -6355,7 +6562,7 @@
         </p:nvSpPr>
         <p:spPr>
           <a:xfrm>
-            <a:off x="731520" y="5513832"/>
+            <a:off x="731520" y="5495544"/>
             <a:ext cx="2194560" cy="457200"/>
           </a:xfrm>
           <a:prstGeom prst="rect">
@@ -6392,7 +6599,7 @@
         </p:nvSpPr>
         <p:spPr>
           <a:xfrm>
-            <a:off x="2926080" y="5513832"/>
+            <a:off x="2926080" y="5495544"/>
             <a:ext cx="1965960" cy="457200"/>
           </a:xfrm>
           <a:prstGeom prst="rect">
@@ -6429,7 +6636,7 @@
         </p:nvSpPr>
         <p:spPr>
           <a:xfrm>
-            <a:off x="4864608" y="5586984"/>
+            <a:off x="4864608" y="5568696"/>
             <a:ext cx="1005840" cy="310896"/>
           </a:xfrm>
           <a:prstGeom prst="roundRect">
@@ -6475,7 +6682,7 @@
         </p:nvSpPr>
         <p:spPr>
           <a:xfrm>
-            <a:off x="4864608" y="5586984"/>
+            <a:off x="4864608" y="5568696"/>
             <a:ext cx="1005840" cy="310896"/>
           </a:xfrm>
           <a:prstGeom prst="rect">
@@ -6593,7 +6800,7 @@
         </p:nvSpPr>
         <p:spPr>
           <a:xfrm>
-            <a:off x="6291072" y="2176272"/>
+            <a:off x="6291072" y="2148840"/>
             <a:ext cx="502920" cy="502920"/>
           </a:xfrm>
           <a:prstGeom prst="ellipse">
@@ -6643,7 +6850,7 @@
         </p:blipFill>
         <p:spPr>
           <a:xfrm>
-            <a:off x="6416802" y="2302002"/>
+            <a:off x="6416802" y="2274570"/>
             <a:ext cx="251460" cy="251460"/>
           </a:xfrm>
           <a:prstGeom prst="rect">
@@ -6659,7 +6866,7 @@
         </p:nvSpPr>
         <p:spPr>
           <a:xfrm>
-            <a:off x="6976872" y="2157984"/>
+            <a:off x="6976872" y="2130552"/>
             <a:ext cx="4709160" cy="329184"/>
           </a:xfrm>
           <a:prstGeom prst="rect">
@@ -6696,8 +6903,8 @@
         </p:nvSpPr>
         <p:spPr>
           <a:xfrm>
-            <a:off x="6976872" y="2523744"/>
-            <a:ext cx="4709160" cy="731520"/>
+            <a:off x="6976872" y="2478024"/>
+            <a:ext cx="4709160" cy="640080"/>
           </a:xfrm>
           <a:prstGeom prst="rect">
             <a:avLst/>
@@ -6737,7 +6944,7 @@
           <a:p>
             <a:pPr algn="l">
               <a:spcBef>
-                <a:spcPts val="400"/>
+                <a:spcPts val="300"/>
               </a:spcBef>
             </a:pPr>
             <a:r>
@@ -6773,7 +6980,7 @@
         </p:nvSpPr>
         <p:spPr>
           <a:xfrm>
-            <a:off x="6291072" y="3364991"/>
+            <a:off x="6291072" y="3200400"/>
             <a:ext cx="502920" cy="502920"/>
           </a:xfrm>
           <a:prstGeom prst="ellipse">
@@ -6823,7 +7030,7 @@
         </p:blipFill>
         <p:spPr>
           <a:xfrm>
-            <a:off x="6416802" y="3490722"/>
+            <a:off x="6416802" y="3326130"/>
             <a:ext cx="251460" cy="251460"/>
           </a:xfrm>
           <a:prstGeom prst="rect">
@@ -6839,7 +7046,7 @@
         </p:nvSpPr>
         <p:spPr>
           <a:xfrm>
-            <a:off x="6976872" y="3346703"/>
+            <a:off x="6976872" y="3182112"/>
             <a:ext cx="4709160" cy="329184"/>
           </a:xfrm>
           <a:prstGeom prst="rect">
@@ -6876,8 +7083,8 @@
         </p:nvSpPr>
         <p:spPr>
           <a:xfrm>
-            <a:off x="6976872" y="3712463"/>
-            <a:ext cx="4709160" cy="731520"/>
+            <a:off x="6976872" y="3529584"/>
+            <a:ext cx="4709160" cy="640080"/>
           </a:xfrm>
           <a:prstGeom prst="rect">
             <a:avLst/>
@@ -6917,7 +7124,7 @@
           <a:p>
             <a:pPr algn="l">
               <a:spcBef>
-                <a:spcPts val="400"/>
+                <a:spcPts val="300"/>
               </a:spcBef>
             </a:pPr>
             <a:r>
@@ -6953,8 +7160,8 @@
         </p:nvSpPr>
         <p:spPr>
           <a:xfrm>
-            <a:off x="6245352" y="4572000"/>
-            <a:ext cx="5486400" cy="1508760"/>
+            <a:off x="6245352" y="4617720"/>
+            <a:ext cx="5486400" cy="1463040"/>
           </a:xfrm>
           <a:prstGeom prst="roundRect">
             <a:avLst>
@@ -6997,7 +7204,7 @@
         </p:nvSpPr>
         <p:spPr>
           <a:xfrm>
-            <a:off x="6519672" y="4663440"/>
+            <a:off x="6519672" y="4690872"/>
             <a:ext cx="1828800" cy="274320"/>
           </a:xfrm>
           <a:prstGeom prst="rect">
@@ -7179,6 +7386,138 @@
                 <a:cs typeface="微软雅黑"/>
               </a:rPr>
               <a:t>lift −54.2%</a:t>
+            </a:r>
+          </a:p>
+        </p:txBody>
+      </p:sp>
+      <p:graphicFrame>
+        <p:nvGraphicFramePr>
+          <p:cNvPr id="40" name="1000条样本分布"/>
+          <p:cNvGraphicFramePr>
+            <a:graphicFrameLocks noGrp="1"/>
+          </p:cNvGraphicFramePr>
+          <p:nvPr/>
+        </p:nvGraphicFramePr>
+        <p:xfrm>
+          <a:off x="1143000" y="3822191"/>
+          <a:ext cx="4343400" cy="384048"/>
+        </p:xfrm>
+        <a:graphic>
+          <a:graphicData uri="http://schemas.openxmlformats.org/drawingml/2006/chart">
+            <c:chart xmlns:c="http://schemas.openxmlformats.org/drawingml/2006/chart" r:id="rId6"/>
+          </a:graphicData>
+        </a:graphic>
+      </p:graphicFrame>
+      <p:sp>
+        <p:nvSpPr>
+          <p:cNvPr id="41" name="TextBox 40"/>
+          <p:cNvSpPr txBox="1"/>
+          <p:nvPr/>
+        </p:nvSpPr>
+        <p:spPr>
+          <a:xfrm>
+            <a:off x="1188720" y="4242816"/>
+            <a:ext cx="4754880" cy="274320"/>
+          </a:xfrm>
+          <a:prstGeom prst="rect">
+            <a:avLst/>
+          </a:prstGeom>
+          <a:noFill/>
+        </p:spPr>
+        <p:txBody>
+          <a:bodyPr wrap="square" lIns="0" rIns="0" tIns="0" bIns="0" anchor="t">
+            <a:spAutoFit/>
+          </a:bodyPr>
+          <a:lstStyle/>
+          <a:p>
+            <a:pPr algn="l"/>
+            <a:r>
+              <a:rPr sz="1000" b="0">
+                <a:solidFill>
+                  <a:srgbClr val="9DBCE8"/>
+                </a:solidFill>
+                <a:latin typeface="微软雅黑"/>
+                <a:ea typeface="微软雅黑"/>
+                <a:cs typeface="微软雅黑"/>
+              </a:rPr>
+              <a:t>■ </a:t>
+            </a:r>
+            <a:r>
+              <a:rPr sz="1000" b="0">
+                <a:solidFill>
+                  <a:srgbClr val="3D4757"/>
+                </a:solidFill>
+                <a:latin typeface="微软雅黑"/>
+                <a:ea typeface="微软雅黑"/>
+                <a:cs typeface="微软雅黑"/>
+              </a:rPr>
+              <a:t>一致 749  </a:t>
+            </a:r>
+            <a:r>
+              <a:rPr sz="1000" b="0">
+                <a:solidFill>
+                  <a:srgbClr val="8DB8F5"/>
+                </a:solidFill>
+                <a:latin typeface="微软雅黑"/>
+                <a:ea typeface="微软雅黑"/>
+                <a:cs typeface="微软雅黑"/>
+              </a:rPr>
+              <a:t>■ </a:t>
+            </a:r>
+            <a:r>
+              <a:rPr sz="1000" b="0">
+                <a:solidFill>
+                  <a:srgbClr val="3D4757"/>
+                </a:solidFill>
+                <a:latin typeface="微软雅黑"/>
+                <a:ea typeface="微软雅黑"/>
+                <a:cs typeface="微软雅黑"/>
+              </a:rPr>
+              <a:t>Agent 对 197  </a:t>
+            </a:r>
+            <a:r>
+              <a:rPr sz="1000" b="0">
+                <a:solidFill>
+                  <a:srgbClr val="FF7A1A"/>
+                </a:solidFill>
+                <a:latin typeface="微软雅黑"/>
+                <a:ea typeface="微软雅黑"/>
+                <a:cs typeface="微软雅黑"/>
+              </a:rPr>
+              <a:t>■ </a:t>
+            </a:r>
+            <a:r>
+              <a:rPr sz="1000" b="1">
+                <a:solidFill>
+                  <a:srgbClr val="FF7A1A"/>
+                </a:solidFill>
+                <a:latin typeface="微软雅黑"/>
+                <a:ea typeface="微软雅黑"/>
+                <a:cs typeface="微软雅黑"/>
+              </a:rPr>
+              <a:t>算法对、Agent 错 21  </a:t>
+            </a:r>
+            <a:r>
+              <a:rPr sz="1000" b="0">
+                <a:solidFill>
+                  <a:srgbClr val="7A8599"/>
+                </a:solidFill>
+                <a:latin typeface="微软雅黑"/>
+                <a:ea typeface="微软雅黑"/>
+                <a:cs typeface="微软雅黑"/>
+              </a:rPr>
+              <a:t>■ </a:t>
+            </a:r>
+            <a:r>
+              <a:rPr sz="1000" b="0">
+                <a:solidFill>
+                  <a:srgbClr val="3D4757"/>
+                </a:solidFill>
+                <a:latin typeface="微软雅黑"/>
+                <a:ea typeface="微软雅黑"/>
+                <a:cs typeface="微软雅黑"/>
+              </a:rPr>
+              <a:t>都错 33  </a:t>
             </a:r>
           </a:p>
         </p:txBody>

--- a/火车票Agent页.pptx
+++ b/火车票Agent页.pptx
@@ -133,9 +133,20 @@
   <c:chart>
     <c:autoTitleDeleted val="1"/>
     <c:plotArea>
-      <c:barChart>
-        <c:barDir val="bar"/>
-        <c:grouping val="stacked"/>
+      <c:layout>
+        <c:manualLayout>
+          <c:layoutTarget val="inner"/>
+          <c:xMode val="edge"/>
+          <c:yMode val="edge"/>
+          <c:x val="0.04"/>
+          <c:y val="0.22"/>
+          <c:w val="0.92"/>
+          <c:h val="0.6"/>
+        </c:manualLayout>
+      </c:layout>
+      <c:lineChart>
+        <c:grouping val="standard"/>
+        <c:varyColors val="0"/>
         <c:ser>
           <c:idx val="0"/>
           <c:order val="0"/>
@@ -145,185 +156,157 @@
               <c:strCache>
                 <c:ptCount val="1"/>
                 <c:pt idx="0">
-                  <c:v>一致</c:v>
+                  <c:v>错分拒答占比</c:v>
                 </c:pt>
               </c:strCache>
             </c:strRef>
           </c:tx>
           <c:spPr>
-            <a:solidFill>
-              <a:srgbClr val="C9DCF8"/>
-            </a:solidFill>
+            <a:ln w="25400">
+              <a:solidFill>
+                <a:srgbClr val="287DFA"/>
+              </a:solidFill>
+            </a:ln>
           </c:spPr>
+          <c:marker>
+            <c:size val="5"/>
+            <c:spPr>
+              <a:solidFill>
+                <a:srgbClr val="287DFA"/>
+              </a:solidFill>
+              <a:ln>
+                <a:solidFill>
+                  <a:srgbClr val="287DFA"/>
+                </a:solidFill>
+              </a:ln>
+            </c:spPr>
+          </c:marker>
           <c:cat>
             <c:strRef>
-              <c:f>Sheet1!$A$2:$A$2</c:f>
+              <c:f>Sheet1!$A$2:$A$15</c:f>
               <c:strCache>
-                <c:ptCount val="1"/>
+                <c:ptCount val="14"/>
                 <c:pt idx="0">
-                  <c:v>样本</c:v>
+                  <c:v>8.7</c:v>
+                </c:pt>
+                <c:pt idx="1">
+                  <c:v>8.8</c:v>
+                </c:pt>
+                <c:pt idx="2">
+                  <c:v>8.9</c:v>
+                </c:pt>
+                <c:pt idx="3">
+                  <c:v>8.10</c:v>
+                </c:pt>
+                <c:pt idx="4">
+                  <c:v>8.11</c:v>
+                </c:pt>
+                <c:pt idx="5">
+                  <c:v>8.12</c:v>
+                </c:pt>
+                <c:pt idx="6">
+                  <c:v>8.13</c:v>
+                </c:pt>
+                <c:pt idx="7">
+                  <c:v>8.14</c:v>
+                </c:pt>
+                <c:pt idx="8">
+                  <c:v>8.15</c:v>
+                </c:pt>
+                <c:pt idx="9">
+                  <c:v>8.16</c:v>
+                </c:pt>
+                <c:pt idx="10">
+                  <c:v>8.17</c:v>
+                </c:pt>
+                <c:pt idx="11">
+                  <c:v>8.18</c:v>
+                </c:pt>
+                <c:pt idx="12">
+                  <c:v>8.19</c:v>
+                </c:pt>
+                <c:pt idx="13">
+                  <c:v>8.20</c:v>
                 </c:pt>
               </c:strCache>
             </c:strRef>
           </c:cat>
           <c:val>
             <c:numRef>
-              <c:f>Sheet1!$B$2:$B$2</c:f>
+              <c:f>Sheet1!$B$2:$B$15</c:f>
               <c:numCache>
                 <c:formatCode>General</c:formatCode>
-                <c:ptCount val="1"/>
+                <c:ptCount val="14"/>
                 <c:pt idx="0">
-                  <c:v>749</c:v>
+                  <c:v>10.73</c:v>
+                </c:pt>
+                <c:pt idx="1">
+                  <c:v>10.65</c:v>
+                </c:pt>
+                <c:pt idx="2">
+                  <c:v>10.1</c:v>
+                </c:pt>
+                <c:pt idx="3">
+                  <c:v>10.1</c:v>
+                </c:pt>
+                <c:pt idx="4">
+                  <c:v>7.18</c:v>
+                </c:pt>
+                <c:pt idx="5">
+                  <c:v>7.46</c:v>
+                </c:pt>
+                <c:pt idx="6">
+                  <c:v>6.91</c:v>
+                </c:pt>
+                <c:pt idx="7">
+                  <c:v>7.2</c:v>
+                </c:pt>
+                <c:pt idx="8">
+                  <c:v>6.14</c:v>
+                </c:pt>
+                <c:pt idx="9">
+                  <c:v>5.98</c:v>
+                </c:pt>
+                <c:pt idx="10">
+                  <c:v>6.28</c:v>
+                </c:pt>
+                <c:pt idx="11">
+                  <c:v>5.69</c:v>
+                </c:pt>
+                <c:pt idx="12">
+                  <c:v>5.51</c:v>
+                </c:pt>
+                <c:pt idx="13">
+                  <c:v>4.93</c:v>
                 </c:pt>
               </c:numCache>
             </c:numRef>
           </c:val>
+          <c:smooth val="0"/>
         </c:ser>
-        <c:ser>
-          <c:idx val="1"/>
-          <c:order val="1"/>
-          <c:tx>
-            <c:strRef>
-              <c:f>Sheet1!$C$1</c:f>
-              <c:strCache>
-                <c:ptCount val="1"/>
-                <c:pt idx="0">
-                  <c:v>Agent 对</c:v>
-                </c:pt>
-              </c:strCache>
-            </c:strRef>
-          </c:tx>
-          <c:spPr>
-            <a:solidFill>
-              <a:srgbClr val="8DB8F5"/>
-            </a:solidFill>
-          </c:spPr>
-          <c:cat>
-            <c:strRef>
-              <c:f>Sheet1!$A$2:$A$2</c:f>
-              <c:strCache>
-                <c:ptCount val="1"/>
-                <c:pt idx="0">
-                  <c:v>样本</c:v>
-                </c:pt>
-              </c:strCache>
-            </c:strRef>
-          </c:cat>
-          <c:val>
-            <c:numRef>
-              <c:f>Sheet1!$C$2:$C$2</c:f>
-              <c:numCache>
-                <c:formatCode>General</c:formatCode>
-                <c:ptCount val="1"/>
-                <c:pt idx="0">
-                  <c:v>197</c:v>
-                </c:pt>
-              </c:numCache>
-            </c:numRef>
-          </c:val>
-        </c:ser>
-        <c:ser>
-          <c:idx val="2"/>
-          <c:order val="2"/>
-          <c:tx>
-            <c:strRef>
-              <c:f>Sheet1!$D$1</c:f>
-              <c:strCache>
-                <c:ptCount val="1"/>
-                <c:pt idx="0">
-                  <c:v>算法对、Agent 错</c:v>
-                </c:pt>
-              </c:strCache>
-            </c:strRef>
-          </c:tx>
-          <c:spPr>
-            <a:solidFill>
-              <a:srgbClr val="FF7A1A"/>
-            </a:solidFill>
-          </c:spPr>
-          <c:cat>
-            <c:strRef>
-              <c:f>Sheet1!$A$2:$A$2</c:f>
-              <c:strCache>
-                <c:ptCount val="1"/>
-                <c:pt idx="0">
-                  <c:v>样本</c:v>
-                </c:pt>
-              </c:strCache>
-            </c:strRef>
-          </c:cat>
-          <c:val>
-            <c:numRef>
-              <c:f>Sheet1!$D$2:$D$2</c:f>
-              <c:numCache>
-                <c:formatCode>General</c:formatCode>
-                <c:ptCount val="1"/>
-                <c:pt idx="0">
-                  <c:v>21</c:v>
-                </c:pt>
-              </c:numCache>
-            </c:numRef>
-          </c:val>
-        </c:ser>
-        <c:ser>
-          <c:idx val="3"/>
-          <c:order val="3"/>
-          <c:tx>
-            <c:strRef>
-              <c:f>Sheet1!$E$1</c:f>
-              <c:strCache>
-                <c:ptCount val="1"/>
-                <c:pt idx="0">
-                  <c:v>都错</c:v>
-                </c:pt>
-              </c:strCache>
-            </c:strRef>
-          </c:tx>
-          <c:spPr>
-            <a:solidFill>
-              <a:srgbClr val="7A8599"/>
-            </a:solidFill>
-          </c:spPr>
-          <c:cat>
-            <c:strRef>
-              <c:f>Sheet1!$A$2:$A$2</c:f>
-              <c:strCache>
-                <c:ptCount val="1"/>
-                <c:pt idx="0">
-                  <c:v>样本</c:v>
-                </c:pt>
-              </c:strCache>
-            </c:strRef>
-          </c:cat>
-          <c:val>
-            <c:numRef>
-              <c:f>Sheet1!$E$2:$E$2</c:f>
-              <c:numCache>
-                <c:formatCode>General</c:formatCode>
-                <c:ptCount val="1"/>
-                <c:pt idx="0">
-                  <c:v>33</c:v>
-                </c:pt>
-              </c:numCache>
-            </c:numRef>
-          </c:val>
-        </c:ser>
-        <c:gapWidth val="0"/>
-        <c:overlap val="100"/>
-        <c:axId val="-2068027336"/>
-        <c:axId val="-2113994440"/>
-      </c:barChart>
+        <c:marker val="1"/>
+        <c:smooth val="0"/>
+        <c:axId val="2118791784"/>
+        <c:axId val="2140495176"/>
+      </c:lineChart>
       <c:catAx>
-        <c:axId val="-2068027336"/>
+        <c:axId val="2118791784"/>
         <c:scaling>
           <c:orientation val="minMax"/>
         </c:scaling>
-        <c:delete/>
-        <c:axPos val="l"/>
-        <c:majorTickMark val="out"/>
+        <c:delete val="0"/>
+        <c:axPos val="b"/>
+        <c:majorTickMark val="none"/>
         <c:minorTickMark val="none"/>
-        <c:tickLblPos val="nextTo"/>
-        <c:crossAx val="-2113994440"/>
+        <c:tickLblPos val="none"/>
+        <c:spPr>
+          <a:ln>
+            <a:solidFill>
+              <a:srgbClr val="D3E2FB"/>
+            </a:solidFill>
+          </a:ln>
+        </c:spPr>
+        <c:crossAx val="2140495176"/>
         <c:crosses val="autoZero"/>
         <c:auto val="1"/>
         <c:lblAlgn val="ctr"/>
@@ -331,21 +314,23 @@
         <c:noMultiLvlLbl val="0"/>
       </c:catAx>
       <c:valAx>
-        <c:axId val="-2113994440"/>
+        <c:axId val="2140495176"/>
         <c:scaling>
-          <c:max val="1000.0"/>
+          <c:max val="13.0"/>
           <c:min val="0.0"/>
         </c:scaling>
         <c:delete/>
-        <c:axPos val="b"/>
+        <c:axPos val="l"/>
         <c:majorTickMark val="out"/>
         <c:minorTickMark val="none"/>
         <c:tickLblPos val="nextTo"/>
-        <c:crossAx val="-2068027336"/>
+        <c:crossAx val="2118791784"/>
         <c:crosses val="autoZero"/>
       </c:valAx>
     </c:plotArea>
+    <c:plotVisOnly val="1"/>
     <c:dispBlanksAs val="gap"/>
+    <c:showDLblsOverMax val="0"/>
   </c:chart>
   <c:txPr>
     <a:bodyPr/>
@@ -5993,7 +5978,7 @@
         </p:nvSpPr>
         <p:spPr>
           <a:xfrm>
-            <a:off x="502920" y="2148840"/>
+            <a:off x="502920" y="2121408"/>
             <a:ext cx="502920" cy="502920"/>
           </a:xfrm>
           <a:prstGeom prst="ellipse">
@@ -6043,7 +6028,7 @@
         </p:blipFill>
         <p:spPr>
           <a:xfrm>
-            <a:off x="628650" y="2274570"/>
+            <a:off x="628650" y="2247138"/>
             <a:ext cx="251460" cy="251460"/>
           </a:xfrm>
           <a:prstGeom prst="rect">
@@ -6059,7 +6044,7 @@
         </p:nvSpPr>
         <p:spPr>
           <a:xfrm>
-            <a:off x="1188720" y="2130552"/>
+            <a:off x="1188720" y="2103120"/>
             <a:ext cx="4709160" cy="329184"/>
           </a:xfrm>
           <a:prstGeom prst="rect">
@@ -6096,7 +6081,7 @@
         </p:nvSpPr>
         <p:spPr>
           <a:xfrm>
-            <a:off x="1188720" y="2478024"/>
+            <a:off x="1188720" y="2450591"/>
             <a:ext cx="4709160" cy="640080"/>
           </a:xfrm>
           <a:prstGeom prst="rect">
@@ -6173,7 +6158,7 @@
         </p:nvSpPr>
         <p:spPr>
           <a:xfrm>
-            <a:off x="502920" y="3200400"/>
+            <a:off x="502920" y="3218687"/>
             <a:ext cx="502920" cy="502920"/>
           </a:xfrm>
           <a:prstGeom prst="ellipse">
@@ -6223,7 +6208,7 @@
         </p:blipFill>
         <p:spPr>
           <a:xfrm>
-            <a:off x="628650" y="3326130"/>
+            <a:off x="628650" y="3344418"/>
             <a:ext cx="251460" cy="251460"/>
           </a:xfrm>
           <a:prstGeom prst="rect">
@@ -6239,7 +6224,7 @@
         </p:nvSpPr>
         <p:spPr>
           <a:xfrm>
-            <a:off x="1188720" y="3182112"/>
+            <a:off x="1188720" y="3200399"/>
             <a:ext cx="4709160" cy="329184"/>
           </a:xfrm>
           <a:prstGeom prst="rect">
@@ -6276,7 +6261,7 @@
         </p:nvSpPr>
         <p:spPr>
           <a:xfrm>
-            <a:off x="1188720" y="3529584"/>
+            <a:off x="1188720" y="3547871"/>
             <a:ext cx="4709160" cy="640080"/>
           </a:xfrm>
           <a:prstGeom prst="rect">
@@ -6314,6 +6299,35 @@
               <a:t>抽样 1,000 条线上 query，与算法业务标签逐条比对</a:t>
             </a:r>
           </a:p>
+          <a:p>
+            <a:pPr algn="l">
+              <a:spcBef>
+                <a:spcPts val="300"/>
+              </a:spcBef>
+            </a:pPr>
+            <a:r>
+              <a:rPr sz="900" b="0">
+                <a:solidFill>
+                  <a:srgbClr val="287DFA"/>
+                </a:solidFill>
+                <a:latin typeface="微软雅黑"/>
+                <a:ea typeface="微软雅黑"/>
+                <a:cs typeface="微软雅黑"/>
+              </a:rPr>
+              <a:t>●  </a:t>
+            </a:r>
+            <a:r>
+              <a:rPr sz="1300" b="0">
+                <a:solidFill>
+                  <a:srgbClr val="3D4757"/>
+                </a:solidFill>
+                <a:latin typeface="微软雅黑"/>
+                <a:ea typeface="微软雅黑"/>
+                <a:cs typeface="微软雅黑"/>
+              </a:rPr>
+              <a:t>针对“算法正确、Agent 错误”的样本，逐类修订分类标准</a:t>
+            </a:r>
+          </a:p>
         </p:txBody>
       </p:sp>
       <p:sp>
@@ -6324,8 +6338,8 @@
         </p:nvSpPr>
         <p:spPr>
           <a:xfrm>
-            <a:off x="457200" y="4617720"/>
-            <a:ext cx="5486400" cy="1463040"/>
+            <a:off x="457200" y="4343400"/>
+            <a:ext cx="5486400" cy="1737360"/>
           </a:xfrm>
           <a:prstGeom prst="roundRect">
             <a:avLst>
@@ -6368,7 +6382,7 @@
         </p:nvSpPr>
         <p:spPr>
           <a:xfrm>
-            <a:off x="731520" y="4690872"/>
+            <a:off x="731520" y="4434840"/>
             <a:ext cx="1828800" cy="274320"/>
           </a:xfrm>
           <a:prstGeom prst="rect">
@@ -6399,101 +6413,25 @@
       </p:sp>
       <p:sp>
         <p:nvSpPr>
-          <p:cNvPr id="16" name="TextBox 15"/>
-          <p:cNvSpPr txBox="1"/>
-          <p:nvPr/>
-        </p:nvSpPr>
-        <p:spPr>
-          <a:xfrm>
-            <a:off x="731520" y="4983480"/>
-            <a:ext cx="2194560" cy="457200"/>
-          </a:xfrm>
-          <a:prstGeom prst="rect">
-            <a:avLst/>
-          </a:prstGeom>
-          <a:noFill/>
-        </p:spPr>
-        <p:txBody>
-          <a:bodyPr wrap="square" lIns="0" rIns="0" tIns="0" bIns="0" anchor="ctr">
-            <a:spAutoFit/>
-          </a:bodyPr>
-          <a:lstStyle/>
-          <a:p>
-            <a:pPr algn="l"/>
-            <a:r>
-              <a:rPr sz="1200" b="1">
-                <a:solidFill>
-                  <a:srgbClr val="3D4757"/>
-                </a:solidFill>
-                <a:latin typeface="微软雅黑"/>
-                <a:ea typeface="微软雅黑"/>
-                <a:cs typeface="微软雅黑"/>
-              </a:rPr>
-              <a:t>意图识别准确率</a:t>
-            </a:r>
-          </a:p>
-        </p:txBody>
-      </p:sp>
-      <p:sp>
-        <p:nvSpPr>
-          <p:cNvPr id="17" name="TextBox 16"/>
-          <p:cNvSpPr txBox="1"/>
-          <p:nvPr/>
-        </p:nvSpPr>
-        <p:spPr>
-          <a:xfrm>
-            <a:off x="2926080" y="4983480"/>
-            <a:ext cx="1965960" cy="457200"/>
-          </a:xfrm>
-          <a:prstGeom prst="rect">
-            <a:avLst/>
-          </a:prstGeom>
-          <a:noFill/>
-        </p:spPr>
-        <p:txBody>
-          <a:bodyPr wrap="square" lIns="0" rIns="0" tIns="0" bIns="0" anchor="ctr">
-            <a:spAutoFit/>
-          </a:bodyPr>
-          <a:lstStyle/>
-          <a:p>
-            <a:pPr algn="l"/>
-            <a:r>
-              <a:rPr sz="1800" b="1">
-                <a:solidFill>
-                  <a:srgbClr val="287DFA"/>
-                </a:solidFill>
-                <a:latin typeface="微软雅黑"/>
-                <a:ea typeface="微软雅黑"/>
-                <a:cs typeface="微软雅黑"/>
-              </a:rPr>
-              <a:t>94.6% → 98%</a:t>
-            </a:r>
-          </a:p>
-        </p:txBody>
-      </p:sp>
-      <p:sp>
-        <p:nvSpPr>
-          <p:cNvPr id="18" name="Rounded Rectangle 17"/>
+          <p:cNvPr id="16" name="Rounded Rectangle 15"/>
           <p:cNvSpPr/>
           <p:nvPr/>
         </p:nvSpPr>
         <p:spPr>
           <a:xfrm>
-            <a:off x="4864608" y="5056632"/>
-            <a:ext cx="1005840" cy="310896"/>
+            <a:off x="6245352" y="1481328"/>
+            <a:ext cx="5486400" cy="502920"/>
           </a:xfrm>
           <a:prstGeom prst="roundRect">
             <a:avLst>
-              <a:gd name="adj" fmla="val 50000"/>
+              <a:gd name="adj" fmla="val 6000"/>
             </a:avLst>
           </a:prstGeom>
           <a:solidFill>
-            <a:srgbClr val="FFFFFF"/>
+            <a:srgbClr val="287DFA"/>
           </a:solidFill>
-          <a:ln w="12700">
-            <a:solidFill>
-              <a:srgbClr val="287DFA"/>
-            </a:solidFill>
+          <a:ln>
+            <a:noFill/>
           </a:ln>
           <a:effectLst/>
         </p:spPr>
@@ -6519,245 +6457,7 @@
       </p:sp>
       <p:sp>
         <p:nvSpPr>
-          <p:cNvPr id="19" name="TextBox 18"/>
-          <p:cNvSpPr txBox="1"/>
-          <p:nvPr/>
-        </p:nvSpPr>
-        <p:spPr>
-          <a:xfrm>
-            <a:off x="4864608" y="5056632"/>
-            <a:ext cx="1005840" cy="310896"/>
-          </a:xfrm>
-          <a:prstGeom prst="rect">
-            <a:avLst/>
-          </a:prstGeom>
-          <a:noFill/>
-        </p:spPr>
-        <p:txBody>
-          <a:bodyPr wrap="square" lIns="0" rIns="0" tIns="0" bIns="0" anchor="ctr">
-            <a:spAutoFit/>
-          </a:bodyPr>
-          <a:lstStyle/>
-          <a:p>
-            <a:pPr algn="ctr"/>
-            <a:r>
-              <a:rPr sz="1000" b="1">
-                <a:solidFill>
-                  <a:srgbClr val="287DFA"/>
-                </a:solidFill>
-                <a:latin typeface="微软雅黑"/>
-                <a:ea typeface="微软雅黑"/>
-                <a:cs typeface="微软雅黑"/>
-              </a:rPr>
-              <a:t>lift +3.59%</a:t>
-            </a:r>
-          </a:p>
-        </p:txBody>
-      </p:sp>
-      <p:sp>
-        <p:nvSpPr>
-          <p:cNvPr id="20" name="TextBox 19"/>
-          <p:cNvSpPr txBox="1"/>
-          <p:nvPr/>
-        </p:nvSpPr>
-        <p:spPr>
-          <a:xfrm>
-            <a:off x="731520" y="5495544"/>
-            <a:ext cx="2194560" cy="457200"/>
-          </a:xfrm>
-          <a:prstGeom prst="rect">
-            <a:avLst/>
-          </a:prstGeom>
-          <a:noFill/>
-        </p:spPr>
-        <p:txBody>
-          <a:bodyPr wrap="square" lIns="0" rIns="0" tIns="0" bIns="0" anchor="ctr">
-            <a:spAutoFit/>
-          </a:bodyPr>
-          <a:lstStyle/>
-          <a:p>
-            <a:pPr algn="l"/>
-            <a:r>
-              <a:rPr sz="1200" b="1">
-                <a:solidFill>
-                  <a:srgbClr val="3D4757"/>
-                </a:solidFill>
-                <a:latin typeface="微软雅黑"/>
-                <a:ea typeface="微软雅黑"/>
-                <a:cs typeface="微软雅黑"/>
-              </a:rPr>
-              <a:t>正文完播率（对比问道兜底）</a:t>
-            </a:r>
-          </a:p>
-        </p:txBody>
-      </p:sp>
-      <p:sp>
-        <p:nvSpPr>
-          <p:cNvPr id="21" name="TextBox 20"/>
-          <p:cNvSpPr txBox="1"/>
-          <p:nvPr/>
-        </p:nvSpPr>
-        <p:spPr>
-          <a:xfrm>
-            <a:off x="2926080" y="5495544"/>
-            <a:ext cx="1965960" cy="457200"/>
-          </a:xfrm>
-          <a:prstGeom prst="rect">
-            <a:avLst/>
-          </a:prstGeom>
-          <a:noFill/>
-        </p:spPr>
-        <p:txBody>
-          <a:bodyPr wrap="square" lIns="0" rIns="0" tIns="0" bIns="0" anchor="ctr">
-            <a:spAutoFit/>
-          </a:bodyPr>
-          <a:lstStyle/>
-          <a:p>
-            <a:pPr algn="l"/>
-            <a:r>
-              <a:rPr sz="1800" b="1">
-                <a:solidFill>
-                  <a:srgbClr val="287DFA"/>
-                </a:solidFill>
-                <a:latin typeface="微软雅黑"/>
-                <a:ea typeface="微软雅黑"/>
-                <a:cs typeface="微软雅黑"/>
-              </a:rPr>
-              <a:t>57% → 60.7%</a:t>
-            </a:r>
-          </a:p>
-        </p:txBody>
-      </p:sp>
-      <p:sp>
-        <p:nvSpPr>
-          <p:cNvPr id="22" name="Rounded Rectangle 21"/>
-          <p:cNvSpPr/>
-          <p:nvPr/>
-        </p:nvSpPr>
-        <p:spPr>
-          <a:xfrm>
-            <a:off x="4864608" y="5568696"/>
-            <a:ext cx="1005840" cy="310896"/>
-          </a:xfrm>
-          <a:prstGeom prst="roundRect">
-            <a:avLst>
-              <a:gd name="adj" fmla="val 50000"/>
-            </a:avLst>
-          </a:prstGeom>
-          <a:solidFill>
-            <a:srgbClr val="FFFFFF"/>
-          </a:solidFill>
-          <a:ln w="12700">
-            <a:solidFill>
-              <a:srgbClr val="287DFA"/>
-            </a:solidFill>
-          </a:ln>
-          <a:effectLst/>
-        </p:spPr>
-        <p:style>
-          <a:lnRef idx="1">
-            <a:schemeClr val="accent1"/>
-          </a:lnRef>
-          <a:fillRef idx="3">
-            <a:schemeClr val="accent1"/>
-          </a:fillRef>
-          <a:effectRef idx="2">
-            <a:schemeClr val="accent1"/>
-          </a:effectRef>
-          <a:fontRef idx="minor">
-            <a:schemeClr val="lt1"/>
-          </a:fontRef>
-        </p:style>
-        <p:txBody>
-          <a:bodyPr rtlCol="0" anchor="ctr"/>
-          <a:lstStyle/>
-          <a:p/>
-        </p:txBody>
-      </p:sp>
-      <p:sp>
-        <p:nvSpPr>
-          <p:cNvPr id="23" name="TextBox 22"/>
-          <p:cNvSpPr txBox="1"/>
-          <p:nvPr/>
-        </p:nvSpPr>
-        <p:spPr>
-          <a:xfrm>
-            <a:off x="4864608" y="5568696"/>
-            <a:ext cx="1005840" cy="310896"/>
-          </a:xfrm>
-          <a:prstGeom prst="rect">
-            <a:avLst/>
-          </a:prstGeom>
-          <a:noFill/>
-        </p:spPr>
-        <p:txBody>
-          <a:bodyPr wrap="square" lIns="0" rIns="0" tIns="0" bIns="0" anchor="ctr">
-            <a:spAutoFit/>
-          </a:bodyPr>
-          <a:lstStyle/>
-          <a:p>
-            <a:pPr algn="ctr"/>
-            <a:r>
-              <a:rPr sz="1000" b="1">
-                <a:solidFill>
-                  <a:srgbClr val="287DFA"/>
-                </a:solidFill>
-                <a:latin typeface="微软雅黑"/>
-                <a:ea typeface="微软雅黑"/>
-                <a:cs typeface="微软雅黑"/>
-              </a:rPr>
-              <a:t>lift +7.7%</a:t>
-            </a:r>
-          </a:p>
-        </p:txBody>
-      </p:sp>
-      <p:sp>
-        <p:nvSpPr>
-          <p:cNvPr id="24" name="Rounded Rectangle 23"/>
-          <p:cNvSpPr/>
-          <p:nvPr/>
-        </p:nvSpPr>
-        <p:spPr>
-          <a:xfrm>
-            <a:off x="6245352" y="1481328"/>
-            <a:ext cx="5486400" cy="502920"/>
-          </a:xfrm>
-          <a:prstGeom prst="roundRect">
-            <a:avLst>
-              <a:gd name="adj" fmla="val 6000"/>
-            </a:avLst>
-          </a:prstGeom>
-          <a:solidFill>
-            <a:srgbClr val="287DFA"/>
-          </a:solidFill>
-          <a:ln>
-            <a:noFill/>
-          </a:ln>
-          <a:effectLst/>
-        </p:spPr>
-        <p:style>
-          <a:lnRef idx="1">
-            <a:schemeClr val="accent1"/>
-          </a:lnRef>
-          <a:fillRef idx="3">
-            <a:schemeClr val="accent1"/>
-          </a:fillRef>
-          <a:effectRef idx="2">
-            <a:schemeClr val="accent1"/>
-          </a:effectRef>
-          <a:fontRef idx="minor">
-            <a:schemeClr val="lt1"/>
-          </a:fontRef>
-        </p:style>
-        <p:txBody>
-          <a:bodyPr rtlCol="0" anchor="ctr"/>
-          <a:lstStyle/>
-          <a:p/>
-        </p:txBody>
-      </p:sp>
-      <p:sp>
-        <p:nvSpPr>
-          <p:cNvPr id="25" name="TextBox 24"/>
+          <p:cNvPr id="17" name="TextBox 16"/>
           <p:cNvSpPr txBox="1"/>
           <p:nvPr/>
         </p:nvSpPr>
@@ -6794,13 +6494,13 @@
       </p:sp>
       <p:sp>
         <p:nvSpPr>
-          <p:cNvPr id="26" name="icon-circle"/>
+          <p:cNvPr id="18" name="icon-circle"/>
           <p:cNvSpPr/>
           <p:nvPr/>
         </p:nvSpPr>
         <p:spPr>
           <a:xfrm>
-            <a:off x="6291072" y="2148840"/>
+            <a:off x="6291072" y="2121408"/>
             <a:ext cx="502920" cy="502920"/>
           </a:xfrm>
           <a:prstGeom prst="ellipse">
@@ -6836,7 +6536,7 @@
       </p:sp>
       <p:pic>
         <p:nvPicPr>
-          <p:cNvPr id="27" name="Picture 26" descr="FaTriangleExclamation_w.png"/>
+          <p:cNvPr id="19" name="Picture 18" descr="FaTriangleExclamation_w.png"/>
           <p:cNvPicPr>
             <a:picLocks noChangeAspect="1"/>
           </p:cNvPicPr>
@@ -6850,7 +6550,7 @@
         </p:blipFill>
         <p:spPr>
           <a:xfrm>
-            <a:off x="6416802" y="2274570"/>
+            <a:off x="6416802" y="2247138"/>
             <a:ext cx="251460" cy="251460"/>
           </a:xfrm>
           <a:prstGeom prst="rect">
@@ -6860,13 +6560,13 @@
       </p:pic>
       <p:sp>
         <p:nvSpPr>
-          <p:cNvPr id="28" name="TextBox 27"/>
+          <p:cNvPr id="20" name="TextBox 19"/>
           <p:cNvSpPr txBox="1"/>
           <p:nvPr/>
         </p:nvSpPr>
         <p:spPr>
           <a:xfrm>
-            <a:off x="6976872" y="2130552"/>
+            <a:off x="6976872" y="2103120"/>
             <a:ext cx="4709160" cy="329184"/>
           </a:xfrm>
           <a:prstGeom prst="rect">
@@ -6897,13 +6597,13 @@
       </p:sp>
       <p:sp>
         <p:nvSpPr>
-          <p:cNvPr id="29" name="TextBox 28"/>
+          <p:cNvPr id="21" name="TextBox 20"/>
           <p:cNvSpPr txBox="1"/>
           <p:nvPr/>
         </p:nvSpPr>
         <p:spPr>
           <a:xfrm>
-            <a:off x="6976872" y="2478024"/>
+            <a:off x="6976872" y="2450591"/>
             <a:ext cx="4709160" cy="640080"/>
           </a:xfrm>
           <a:prstGeom prst="rect">
@@ -6974,13 +6674,13 @@
       </p:sp>
       <p:sp>
         <p:nvSpPr>
-          <p:cNvPr id="30" name="icon-circle"/>
+          <p:cNvPr id="22" name="icon-circle"/>
           <p:cNvSpPr/>
           <p:nvPr/>
         </p:nvSpPr>
         <p:spPr>
           <a:xfrm>
-            <a:off x="6291072" y="3200400"/>
+            <a:off x="6291072" y="3218687"/>
             <a:ext cx="502920" cy="502920"/>
           </a:xfrm>
           <a:prstGeom prst="ellipse">
@@ -7016,7 +6716,7 @@
       </p:sp>
       <p:pic>
         <p:nvPicPr>
-          <p:cNvPr id="31" name="Picture 30" descr="FaFilter_w.png"/>
+          <p:cNvPr id="23" name="Picture 22" descr="FaFilter_w.png"/>
           <p:cNvPicPr>
             <a:picLocks noChangeAspect="1"/>
           </p:cNvPicPr>
@@ -7030,7 +6730,7 @@
         </p:blipFill>
         <p:spPr>
           <a:xfrm>
-            <a:off x="6416802" y="3326130"/>
+            <a:off x="6416802" y="3344418"/>
             <a:ext cx="251460" cy="251460"/>
           </a:xfrm>
           <a:prstGeom prst="rect">
@@ -7040,13 +6740,13 @@
       </p:pic>
       <p:sp>
         <p:nvSpPr>
-          <p:cNvPr id="32" name="TextBox 31"/>
+          <p:cNvPr id="24" name="TextBox 23"/>
           <p:cNvSpPr txBox="1"/>
           <p:nvPr/>
         </p:nvSpPr>
         <p:spPr>
           <a:xfrm>
-            <a:off x="6976872" y="3182112"/>
+            <a:off x="6976872" y="3200399"/>
             <a:ext cx="4709160" cy="329184"/>
           </a:xfrm>
           <a:prstGeom prst="rect">
@@ -7077,13 +6777,13 @@
       </p:sp>
       <p:sp>
         <p:nvSpPr>
-          <p:cNvPr id="33" name="TextBox 32"/>
+          <p:cNvPr id="25" name="TextBox 24"/>
           <p:cNvSpPr txBox="1"/>
           <p:nvPr/>
         </p:nvSpPr>
         <p:spPr>
           <a:xfrm>
-            <a:off x="6976872" y="3529584"/>
+            <a:off x="6976872" y="3547871"/>
             <a:ext cx="4709160" cy="640080"/>
           </a:xfrm>
           <a:prstGeom prst="rect">
@@ -7154,14 +6854,14 @@
       </p:sp>
       <p:sp>
         <p:nvSpPr>
-          <p:cNvPr id="34" name="Rounded Rectangle 33"/>
+          <p:cNvPr id="26" name="Rounded Rectangle 25"/>
           <p:cNvSpPr/>
           <p:nvPr/>
         </p:nvSpPr>
         <p:spPr>
           <a:xfrm>
-            <a:off x="6245352" y="4617720"/>
-            <a:ext cx="5486400" cy="1463040"/>
+            <a:off x="6245352" y="4343400"/>
+            <a:ext cx="5486400" cy="1737360"/>
           </a:xfrm>
           <a:prstGeom prst="roundRect">
             <a:avLst>
@@ -7173,6 +6873,320 @@
           </a:solidFill>
           <a:ln>
             <a:noFill/>
+          </a:ln>
+          <a:effectLst/>
+        </p:spPr>
+        <p:style>
+          <a:lnRef idx="1">
+            <a:schemeClr val="accent1"/>
+          </a:lnRef>
+          <a:fillRef idx="3">
+            <a:schemeClr val="accent1"/>
+          </a:fillRef>
+          <a:effectRef idx="2">
+            <a:schemeClr val="accent1"/>
+          </a:effectRef>
+          <a:fontRef idx="minor">
+            <a:schemeClr val="lt1"/>
+          </a:fontRef>
+        </p:style>
+        <p:txBody>
+          <a:bodyPr rtlCol="0" anchor="ctr"/>
+          <a:lstStyle/>
+          <a:p/>
+        </p:txBody>
+      </p:sp>
+      <p:sp>
+        <p:nvSpPr>
+          <p:cNvPr id="27" name="TextBox 26"/>
+          <p:cNvSpPr txBox="1"/>
+          <p:nvPr/>
+        </p:nvSpPr>
+        <p:spPr>
+          <a:xfrm>
+            <a:off x="6519672" y="4434840"/>
+            <a:ext cx="1828800" cy="274320"/>
+          </a:xfrm>
+          <a:prstGeom prst="rect">
+            <a:avLst/>
+          </a:prstGeom>
+          <a:noFill/>
+        </p:spPr>
+        <p:txBody>
+          <a:bodyPr wrap="square" lIns="0" rIns="0" tIns="0" bIns="0" anchor="t">
+            <a:spAutoFit/>
+          </a:bodyPr>
+          <a:lstStyle/>
+          <a:p>
+            <a:pPr algn="l"/>
+            <a:r>
+              <a:rPr sz="1400" b="1">
+                <a:solidFill>
+                  <a:srgbClr val="287DFA"/>
+                </a:solidFill>
+                <a:latin typeface="微软雅黑"/>
+                <a:ea typeface="微软雅黑"/>
+                <a:cs typeface="微软雅黑"/>
+              </a:rPr>
+              <a:t>结果</a:t>
+            </a:r>
+          </a:p>
+        </p:txBody>
+      </p:sp>
+      <p:sp>
+        <p:nvSpPr>
+          <p:cNvPr id="28" name="TextBox 27"/>
+          <p:cNvSpPr txBox="1"/>
+          <p:nvPr/>
+        </p:nvSpPr>
+        <p:spPr>
+          <a:xfrm>
+            <a:off x="731520" y="4800600"/>
+            <a:ext cx="2103120" cy="457200"/>
+          </a:xfrm>
+          <a:prstGeom prst="rect">
+            <a:avLst/>
+          </a:prstGeom>
+          <a:noFill/>
+        </p:spPr>
+        <p:txBody>
+          <a:bodyPr wrap="square" lIns="0" rIns="0" tIns="0" bIns="0" anchor="ctr">
+            <a:spAutoFit/>
+          </a:bodyPr>
+          <a:lstStyle/>
+          <a:p>
+            <a:pPr algn="l"/>
+            <a:r>
+              <a:rPr sz="1200" b="1">
+                <a:solidFill>
+                  <a:srgbClr val="3D4757"/>
+                </a:solidFill>
+                <a:latin typeface="微软雅黑"/>
+                <a:ea typeface="微软雅黑"/>
+                <a:cs typeface="微软雅黑"/>
+              </a:rPr>
+              <a:t>意图识别准确率</a:t>
+            </a:r>
+          </a:p>
+        </p:txBody>
+      </p:sp>
+      <p:sp>
+        <p:nvSpPr>
+          <p:cNvPr id="29" name="TextBox 28"/>
+          <p:cNvSpPr txBox="1"/>
+          <p:nvPr/>
+        </p:nvSpPr>
+        <p:spPr>
+          <a:xfrm>
+            <a:off x="2834639" y="4800600"/>
+            <a:ext cx="1965960" cy="457200"/>
+          </a:xfrm>
+          <a:prstGeom prst="rect">
+            <a:avLst/>
+          </a:prstGeom>
+          <a:noFill/>
+        </p:spPr>
+        <p:txBody>
+          <a:bodyPr wrap="square" lIns="0" rIns="0" tIns="0" bIns="0" anchor="ctr">
+            <a:spAutoFit/>
+          </a:bodyPr>
+          <a:lstStyle/>
+          <a:p>
+            <a:pPr algn="l"/>
+            <a:r>
+              <a:rPr sz="1800" b="1">
+                <a:solidFill>
+                  <a:srgbClr val="287DFA"/>
+                </a:solidFill>
+                <a:latin typeface="微软雅黑"/>
+                <a:ea typeface="微软雅黑"/>
+                <a:cs typeface="微软雅黑"/>
+              </a:rPr>
+              <a:t>94.6% → 98%</a:t>
+            </a:r>
+          </a:p>
+        </p:txBody>
+      </p:sp>
+      <p:sp>
+        <p:nvSpPr>
+          <p:cNvPr id="30" name="Rounded Rectangle 29"/>
+          <p:cNvSpPr/>
+          <p:nvPr/>
+        </p:nvSpPr>
+        <p:spPr>
+          <a:xfrm>
+            <a:off x="4709160" y="4873752"/>
+            <a:ext cx="1005840" cy="310896"/>
+          </a:xfrm>
+          <a:prstGeom prst="roundRect">
+            <a:avLst>
+              <a:gd name="adj" fmla="val 50000"/>
+            </a:avLst>
+          </a:prstGeom>
+          <a:solidFill>
+            <a:srgbClr val="FFFFFF"/>
+          </a:solidFill>
+          <a:ln w="12700">
+            <a:solidFill>
+              <a:srgbClr val="287DFA"/>
+            </a:solidFill>
+          </a:ln>
+          <a:effectLst/>
+        </p:spPr>
+        <p:style>
+          <a:lnRef idx="1">
+            <a:schemeClr val="accent1"/>
+          </a:lnRef>
+          <a:fillRef idx="3">
+            <a:schemeClr val="accent1"/>
+          </a:fillRef>
+          <a:effectRef idx="2">
+            <a:schemeClr val="accent1"/>
+          </a:effectRef>
+          <a:fontRef idx="minor">
+            <a:schemeClr val="lt1"/>
+          </a:fontRef>
+        </p:style>
+        <p:txBody>
+          <a:bodyPr rtlCol="0" anchor="ctr"/>
+          <a:lstStyle/>
+          <a:p/>
+        </p:txBody>
+      </p:sp>
+      <p:sp>
+        <p:nvSpPr>
+          <p:cNvPr id="31" name="TextBox 30"/>
+          <p:cNvSpPr txBox="1"/>
+          <p:nvPr/>
+        </p:nvSpPr>
+        <p:spPr>
+          <a:xfrm>
+            <a:off x="4709160" y="4873752"/>
+            <a:ext cx="1005840" cy="310896"/>
+          </a:xfrm>
+          <a:prstGeom prst="rect">
+            <a:avLst/>
+          </a:prstGeom>
+          <a:noFill/>
+        </p:spPr>
+        <p:txBody>
+          <a:bodyPr wrap="square" lIns="0" rIns="0" tIns="0" bIns="0" anchor="ctr">
+            <a:spAutoFit/>
+          </a:bodyPr>
+          <a:lstStyle/>
+          <a:p>
+            <a:pPr algn="ctr"/>
+            <a:r>
+              <a:rPr sz="1000" b="1">
+                <a:solidFill>
+                  <a:srgbClr val="287DFA"/>
+                </a:solidFill>
+                <a:latin typeface="微软雅黑"/>
+                <a:ea typeface="微软雅黑"/>
+                <a:cs typeface="微软雅黑"/>
+              </a:rPr>
+              <a:t>lift +3.59%</a:t>
+            </a:r>
+          </a:p>
+        </p:txBody>
+      </p:sp>
+      <p:sp>
+        <p:nvSpPr>
+          <p:cNvPr id="32" name="TextBox 31"/>
+          <p:cNvSpPr txBox="1"/>
+          <p:nvPr/>
+        </p:nvSpPr>
+        <p:spPr>
+          <a:xfrm>
+            <a:off x="731520" y="5349240"/>
+            <a:ext cx="2103120" cy="457200"/>
+          </a:xfrm>
+          <a:prstGeom prst="rect">
+            <a:avLst/>
+          </a:prstGeom>
+          <a:noFill/>
+        </p:spPr>
+        <p:txBody>
+          <a:bodyPr wrap="square" lIns="0" rIns="0" tIns="0" bIns="0" anchor="ctr">
+            <a:spAutoFit/>
+          </a:bodyPr>
+          <a:lstStyle/>
+          <a:p>
+            <a:pPr algn="l"/>
+            <a:r>
+              <a:rPr sz="1200" b="1">
+                <a:solidFill>
+                  <a:srgbClr val="3D4757"/>
+                </a:solidFill>
+                <a:latin typeface="微软雅黑"/>
+                <a:ea typeface="微软雅黑"/>
+                <a:cs typeface="微软雅黑"/>
+              </a:rPr>
+              <a:t>正文完播率（对比问道兜底）</a:t>
+            </a:r>
+          </a:p>
+        </p:txBody>
+      </p:sp>
+      <p:sp>
+        <p:nvSpPr>
+          <p:cNvPr id="33" name="TextBox 32"/>
+          <p:cNvSpPr txBox="1"/>
+          <p:nvPr/>
+        </p:nvSpPr>
+        <p:spPr>
+          <a:xfrm>
+            <a:off x="2834639" y="5349240"/>
+            <a:ext cx="1965960" cy="457200"/>
+          </a:xfrm>
+          <a:prstGeom prst="rect">
+            <a:avLst/>
+          </a:prstGeom>
+          <a:noFill/>
+        </p:spPr>
+        <p:txBody>
+          <a:bodyPr wrap="square" lIns="0" rIns="0" tIns="0" bIns="0" anchor="ctr">
+            <a:spAutoFit/>
+          </a:bodyPr>
+          <a:lstStyle/>
+          <a:p>
+            <a:pPr algn="l"/>
+            <a:r>
+              <a:rPr sz="1800" b="1">
+                <a:solidFill>
+                  <a:srgbClr val="287DFA"/>
+                </a:solidFill>
+                <a:latin typeface="微软雅黑"/>
+                <a:ea typeface="微软雅黑"/>
+                <a:cs typeface="微软雅黑"/>
+              </a:rPr>
+              <a:t>57% → 60.7%</a:t>
+            </a:r>
+          </a:p>
+        </p:txBody>
+      </p:sp>
+      <p:sp>
+        <p:nvSpPr>
+          <p:cNvPr id="34" name="Rounded Rectangle 33"/>
+          <p:cNvSpPr/>
+          <p:nvPr/>
+        </p:nvSpPr>
+        <p:spPr>
+          <a:xfrm>
+            <a:off x="4709160" y="5422392"/>
+            <a:ext cx="1005840" cy="310896"/>
+          </a:xfrm>
+          <a:prstGeom prst="roundRect">
+            <a:avLst>
+              <a:gd name="adj" fmla="val 50000"/>
+            </a:avLst>
+          </a:prstGeom>
+          <a:solidFill>
+            <a:srgbClr val="FFFFFF"/>
+          </a:solidFill>
+          <a:ln w="12700">
+            <a:solidFill>
+              <a:srgbClr val="287DFA"/>
+            </a:solidFill>
           </a:ln>
           <a:effectLst/>
         </p:spPr>
@@ -7204,8 +7218,8 @@
         </p:nvSpPr>
         <p:spPr>
           <a:xfrm>
-            <a:off x="6519672" y="4690872"/>
-            <a:ext cx="1828800" cy="274320"/>
+            <a:off x="4709160" y="5422392"/>
+            <a:ext cx="1005840" cy="310896"/>
           </a:xfrm>
           <a:prstGeom prst="rect">
             <a:avLst/>
@@ -7213,14 +7227,14 @@
           <a:noFill/>
         </p:spPr>
         <p:txBody>
-          <a:bodyPr wrap="square" lIns="0" rIns="0" tIns="0" bIns="0" anchor="t">
+          <a:bodyPr wrap="square" lIns="0" rIns="0" tIns="0" bIns="0" anchor="ctr">
             <a:spAutoFit/>
           </a:bodyPr>
           <a:lstStyle/>
           <a:p>
-            <a:pPr algn="l"/>
+            <a:pPr algn="ctr"/>
             <a:r>
-              <a:rPr sz="1400" b="1">
+              <a:rPr sz="1000" b="1">
                 <a:solidFill>
                   <a:srgbClr val="287DFA"/>
                 </a:solidFill>
@@ -7228,7 +7242,7 @@
                 <a:ea typeface="微软雅黑"/>
                 <a:cs typeface="微软雅黑"/>
               </a:rPr>
-              <a:t>结果</a:t>
+              <a:t>lift +7.7%</a:t>
             </a:r>
           </a:p>
         </p:txBody>
@@ -7241,8 +7255,8 @@
         </p:nvSpPr>
         <p:spPr>
           <a:xfrm>
-            <a:off x="6519672" y="5212080"/>
-            <a:ext cx="2194560" cy="457200"/>
+            <a:off x="6519672" y="4754880"/>
+            <a:ext cx="2377440" cy="274320"/>
           </a:xfrm>
           <a:prstGeom prst="rect">
             <a:avLst/>
@@ -7250,7 +7264,7 @@
           <a:noFill/>
         </p:spPr>
         <p:txBody>
-          <a:bodyPr wrap="square" lIns="0" rIns="0" tIns="0" bIns="0" anchor="ctr">
+          <a:bodyPr wrap="square" lIns="0" rIns="0" tIns="0" bIns="0" anchor="t">
             <a:spAutoFit/>
           </a:bodyPr>
           <a:lstStyle/>
@@ -7278,8 +7292,8 @@
         </p:nvSpPr>
         <p:spPr>
           <a:xfrm>
-            <a:off x="8714232" y="5212080"/>
-            <a:ext cx="1965960" cy="457200"/>
+            <a:off x="6519672" y="5029200"/>
+            <a:ext cx="2377440" cy="457200"/>
           </a:xfrm>
           <a:prstGeom prst="rect">
             <a:avLst/>
@@ -7287,7 +7301,7 @@
           <a:noFill/>
         </p:spPr>
         <p:txBody>
-          <a:bodyPr wrap="square" lIns="0" rIns="0" tIns="0" bIns="0" anchor="ctr">
+          <a:bodyPr wrap="square" lIns="0" rIns="0" tIns="0" bIns="0" anchor="t">
             <a:spAutoFit/>
           </a:bodyPr>
           <a:lstStyle/>
@@ -7315,7 +7329,7 @@
         </p:nvSpPr>
         <p:spPr>
           <a:xfrm>
-            <a:off x="10652760" y="5285232"/>
+            <a:off x="6519672" y="5559552"/>
             <a:ext cx="1005840" cy="310896"/>
           </a:xfrm>
           <a:prstGeom prst="roundRect">
@@ -7361,7 +7375,7 @@
         </p:nvSpPr>
         <p:spPr>
           <a:xfrm>
-            <a:off x="10652760" y="5285232"/>
+            <a:off x="6519672" y="5559552"/>
             <a:ext cx="1005840" cy="310896"/>
           </a:xfrm>
           <a:prstGeom prst="rect">
@@ -7390,34 +7404,16 @@
           </a:p>
         </p:txBody>
       </p:sp>
-      <p:graphicFrame>
-        <p:nvGraphicFramePr>
-          <p:cNvPr id="40" name="1000条样本分布"/>
-          <p:cNvGraphicFramePr>
-            <a:graphicFrameLocks noGrp="1"/>
-          </p:cNvGraphicFramePr>
-          <p:nvPr/>
-        </p:nvGraphicFramePr>
-        <p:xfrm>
-          <a:off x="1143000" y="3822191"/>
-          <a:ext cx="4343400" cy="384048"/>
-        </p:xfrm>
-        <a:graphic>
-          <a:graphicData uri="http://schemas.openxmlformats.org/drawingml/2006/chart">
-            <c:chart xmlns:c="http://schemas.openxmlformats.org/drawingml/2006/chart" r:id="rId6"/>
-          </a:graphicData>
-        </a:graphic>
-      </p:graphicFrame>
       <p:sp>
         <p:nvSpPr>
-          <p:cNvPr id="41" name="TextBox 40"/>
+          <p:cNvPr id="40" name="TextBox 39"/>
           <p:cNvSpPr txBox="1"/>
           <p:nvPr/>
         </p:nvSpPr>
         <p:spPr>
           <a:xfrm>
-            <a:off x="1188720" y="4242816"/>
-            <a:ext cx="4754880" cy="274320"/>
+            <a:off x="8988552" y="4434840"/>
+            <a:ext cx="2651760" cy="256032"/>
           </a:xfrm>
           <a:prstGeom prst="rect">
             <a:avLst/>
@@ -7434,57 +7430,13 @@
             <a:r>
               <a:rPr sz="1000" b="0">
                 <a:solidFill>
-                  <a:srgbClr val="9DBCE8"/>
-                </a:solidFill>
-                <a:latin typeface="微软雅黑"/>
-                <a:ea typeface="微软雅黑"/>
-                <a:cs typeface="微软雅黑"/>
-              </a:rPr>
-              <a:t>■ </a:t>
-            </a:r>
-            <a:r>
-              <a:rPr sz="1000" b="0">
-                <a:solidFill>
                   <a:srgbClr val="3D4757"/>
                 </a:solidFill>
                 <a:latin typeface="微软雅黑"/>
                 <a:ea typeface="微软雅黑"/>
                 <a:cs typeface="微软雅黑"/>
               </a:rPr>
-              <a:t>一致 749  </a:t>
-            </a:r>
-            <a:r>
-              <a:rPr sz="1000" b="0">
-                <a:solidFill>
-                  <a:srgbClr val="8DB8F5"/>
-                </a:solidFill>
-                <a:latin typeface="微软雅黑"/>
-                <a:ea typeface="微软雅黑"/>
-                <a:cs typeface="微软雅黑"/>
-              </a:rPr>
-              <a:t>■ </a:t>
-            </a:r>
-            <a:r>
-              <a:rPr sz="1000" b="0">
-                <a:solidFill>
-                  <a:srgbClr val="3D4757"/>
-                </a:solidFill>
-                <a:latin typeface="微软雅黑"/>
-                <a:ea typeface="微软雅黑"/>
-                <a:cs typeface="微软雅黑"/>
-              </a:rPr>
-              <a:t>Agent 对 197  </a:t>
-            </a:r>
-            <a:r>
-              <a:rPr sz="1000" b="0">
-                <a:solidFill>
-                  <a:srgbClr val="FF7A1A"/>
-                </a:solidFill>
-                <a:latin typeface="微软雅黑"/>
-                <a:ea typeface="微软雅黑"/>
-                <a:cs typeface="微软雅黑"/>
-              </a:rPr>
-              <a:t>■ </a:t>
+              <a:t>逐日占比　</a:t>
             </a:r>
             <a:r>
               <a:rPr sz="1000" b="1">
@@ -7495,21 +7447,54 @@
                 <a:ea typeface="微软雅黑"/>
                 <a:cs typeface="微软雅黑"/>
               </a:rPr>
-              <a:t>算法对、Agent 错 21  </a:t>
+              <a:t>8.10 问道调整分发</a:t>
             </a:r>
+          </a:p>
+        </p:txBody>
+      </p:sp>
+      <p:graphicFrame>
+        <p:nvGraphicFramePr>
+          <p:cNvPr id="41" name="错分拒答占比逐日"/>
+          <p:cNvGraphicFramePr>
+            <a:graphicFrameLocks noGrp="1"/>
+          </p:cNvGraphicFramePr>
+          <p:nvPr/>
+        </p:nvGraphicFramePr>
+        <p:xfrm>
+          <a:off x="8851392" y="4663440"/>
+          <a:ext cx="2788920" cy="1371600"/>
+        </p:xfrm>
+        <a:graphic>
+          <a:graphicData uri="http://schemas.openxmlformats.org/drawingml/2006/chart">
+            <c:chart xmlns:c="http://schemas.openxmlformats.org/drawingml/2006/chart" r:id="rId6"/>
+          </a:graphicData>
+        </a:graphic>
+      </p:graphicFrame>
+      <p:sp>
+        <p:nvSpPr>
+          <p:cNvPr id="42" name="TextBox 41"/>
+          <p:cNvSpPr txBox="1"/>
+          <p:nvPr/>
+        </p:nvSpPr>
+        <p:spPr>
+          <a:xfrm>
+            <a:off x="8780264" y="5824728"/>
+            <a:ext cx="548640" cy="201168"/>
+          </a:xfrm>
+          <a:prstGeom prst="rect">
+            <a:avLst/>
+          </a:prstGeom>
+          <a:noFill/>
+        </p:spPr>
+        <p:txBody>
+          <a:bodyPr wrap="square" lIns="0" rIns="0" tIns="0" bIns="0" anchor="t">
+            <a:spAutoFit/>
+          </a:bodyPr>
+          <a:lstStyle/>
+          <a:p>
+            <a:pPr algn="ctr"/>
             <a:r>
-              <a:rPr sz="1000" b="0">
-                <a:solidFill>
-                  <a:srgbClr val="7A8599"/>
-                </a:solidFill>
-                <a:latin typeface="微软雅黑"/>
-                <a:ea typeface="微软雅黑"/>
-                <a:cs typeface="微软雅黑"/>
-              </a:rPr>
-              <a:t>■ </a:t>
-            </a:r>
-            <a:r>
-              <a:rPr sz="1000" b="0">
+              <a:rPr sz="900" b="0">
                 <a:solidFill>
                   <a:srgbClr val="3D4757"/>
                 </a:solidFill>
@@ -7517,11 +7502,195 @@
                 <a:ea typeface="微软雅黑"/>
                 <a:cs typeface="微软雅黑"/>
               </a:rPr>
-              <a:t>都错 33  </a:t>
+              <a:t>8.7</a:t>
             </a:r>
           </a:p>
         </p:txBody>
       </p:sp>
+      <p:sp>
+        <p:nvSpPr>
+          <p:cNvPr id="43" name="TextBox 42"/>
+          <p:cNvSpPr txBox="1"/>
+          <p:nvPr/>
+        </p:nvSpPr>
+        <p:spPr>
+          <a:xfrm>
+            <a:off x="9330080" y="5824728"/>
+            <a:ext cx="548640" cy="201168"/>
+          </a:xfrm>
+          <a:prstGeom prst="rect">
+            <a:avLst/>
+          </a:prstGeom>
+          <a:noFill/>
+        </p:spPr>
+        <p:txBody>
+          <a:bodyPr wrap="square" lIns="0" rIns="0" tIns="0" bIns="0" anchor="t">
+            <a:spAutoFit/>
+          </a:bodyPr>
+          <a:lstStyle/>
+          <a:p>
+            <a:pPr algn="ctr"/>
+            <a:r>
+              <a:rPr sz="900" b="0">
+                <a:solidFill>
+                  <a:srgbClr val="FF7A1A"/>
+                </a:solidFill>
+                <a:latin typeface="微软雅黑"/>
+                <a:ea typeface="微软雅黑"/>
+                <a:cs typeface="微软雅黑"/>
+              </a:rPr>
+              <a:t>8.10</a:t>
+            </a:r>
+          </a:p>
+        </p:txBody>
+      </p:sp>
+      <p:sp>
+        <p:nvSpPr>
+          <p:cNvPr id="44" name="TextBox 43"/>
+          <p:cNvSpPr txBox="1"/>
+          <p:nvPr/>
+        </p:nvSpPr>
+        <p:spPr>
+          <a:xfrm>
+            <a:off x="11162799" y="5824728"/>
+            <a:ext cx="548640" cy="201168"/>
+          </a:xfrm>
+          <a:prstGeom prst="rect">
+            <a:avLst/>
+          </a:prstGeom>
+          <a:noFill/>
+        </p:spPr>
+        <p:txBody>
+          <a:bodyPr wrap="square" lIns="0" rIns="0" tIns="0" bIns="0" anchor="t">
+            <a:spAutoFit/>
+          </a:bodyPr>
+          <a:lstStyle/>
+          <a:p>
+            <a:pPr algn="ctr"/>
+            <a:r>
+              <a:rPr sz="900" b="0">
+                <a:solidFill>
+                  <a:srgbClr val="3D4757"/>
+                </a:solidFill>
+                <a:latin typeface="微软雅黑"/>
+                <a:ea typeface="微软雅黑"/>
+                <a:cs typeface="微软雅黑"/>
+              </a:rPr>
+              <a:t>8.20</a:t>
+            </a:r>
+          </a:p>
+        </p:txBody>
+      </p:sp>
+      <p:sp>
+        <p:nvSpPr>
+          <p:cNvPr id="45" name="TextBox 44"/>
+          <p:cNvSpPr txBox="1"/>
+          <p:nvPr/>
+        </p:nvSpPr>
+        <p:spPr>
+          <a:xfrm>
+            <a:off x="8688824" y="4834573"/>
+            <a:ext cx="731520" cy="219456"/>
+          </a:xfrm>
+          <a:prstGeom prst="rect">
+            <a:avLst/>
+          </a:prstGeom>
+          <a:noFill/>
+        </p:spPr>
+        <p:txBody>
+          <a:bodyPr wrap="square" lIns="0" rIns="0" tIns="0" bIns="0" anchor="t">
+            <a:spAutoFit/>
+          </a:bodyPr>
+          <a:lstStyle/>
+          <a:p>
+            <a:pPr algn="ctr"/>
+            <a:r>
+              <a:rPr sz="1100" b="1">
+                <a:solidFill>
+                  <a:srgbClr val="15315E"/>
+                </a:solidFill>
+                <a:latin typeface="微软雅黑"/>
+                <a:ea typeface="微软雅黑"/>
+                <a:cs typeface="微软雅黑"/>
+              </a:rPr>
+              <a:t>10.7%</a:t>
+            </a:r>
+          </a:p>
+        </p:txBody>
+      </p:sp>
+      <p:sp>
+        <p:nvSpPr>
+          <p:cNvPr id="46" name="TextBox 45"/>
+          <p:cNvSpPr txBox="1"/>
+          <p:nvPr/>
+        </p:nvSpPr>
+        <p:spPr>
+          <a:xfrm>
+            <a:off x="11071359" y="5201740"/>
+            <a:ext cx="731520" cy="219456"/>
+          </a:xfrm>
+          <a:prstGeom prst="rect">
+            <a:avLst/>
+          </a:prstGeom>
+          <a:noFill/>
+        </p:spPr>
+        <p:txBody>
+          <a:bodyPr wrap="square" lIns="0" rIns="0" tIns="0" bIns="0" anchor="t">
+            <a:spAutoFit/>
+          </a:bodyPr>
+          <a:lstStyle/>
+          <a:p>
+            <a:pPr algn="ctr"/>
+            <a:r>
+              <a:rPr sz="1100" b="1">
+                <a:solidFill>
+                  <a:srgbClr val="15315E"/>
+                </a:solidFill>
+                <a:latin typeface="微软雅黑"/>
+                <a:ea typeface="微软雅黑"/>
+                <a:cs typeface="微软雅黑"/>
+              </a:rPr>
+              <a:t>4.9%</a:t>
+            </a:r>
+          </a:p>
+        </p:txBody>
+      </p:sp>
+      <p:cxnSp>
+        <p:nvCxnSpPr>
+          <p:cNvPr id="47" name="Connector 46"/>
+          <p:cNvCxnSpPr/>
+          <p:nvPr/>
+        </p:nvCxnSpPr>
+        <p:spPr>
+          <a:xfrm>
+            <a:off x="9604400" y="4919472"/>
+            <a:ext cx="0" cy="868680"/>
+          </a:xfrm>
+          <a:prstGeom prst="line">
+            <a:avLst/>
+          </a:prstGeom>
+          <a:ln w="12700">
+            <a:solidFill>
+              <a:srgbClr val="FF7A1A"/>
+            </a:solidFill>
+            <a:prstDash val="dash"/>
+          </a:ln>
+        </p:spPr>
+        <p:style>
+          <a:lnRef idx="2">
+            <a:schemeClr val="accent1"/>
+          </a:lnRef>
+          <a:fillRef idx="0">
+            <a:schemeClr val="accent1"/>
+          </a:fillRef>
+          <a:effectRef idx="1">
+            <a:schemeClr val="accent1"/>
+          </a:effectRef>
+          <a:fontRef idx="minor">
+            <a:schemeClr val="tx1"/>
+          </a:fontRef>
+        </p:style>
+      </p:cxnSp>
     </p:spTree>
   </p:cSld>
   <p:clrMapOvr>
